--- a/others/update_presentation.pptx
+++ b/others/update_presentation.pptx
@@ -3129,7 +3129,7 @@
                   <a:srgbClr val="9FB2C8"/>
                 </a:solidFill>
               </a:rPr>
-              <a:t>Group 5  —  Shakil Ahmed  ·  Fahim Foysal  ·  Shefa Tabassum  ·  Tanvir Ahmed</a:t>
+              <a:t>Group 5  |  Shakil Ahmed  ·  Fahim Foysal  ·  Shefa Tabassum  ·  Tanvir Ahmed</a:t>
             </a:r>
           </a:p>
         </p:txBody>
@@ -3212,7 +3212,7 @@
                   <a:srgbClr val="FFFFFF"/>
                 </a:solidFill>
               </a:rPr>
-              <a:t>Project Update — Update 1</a:t>
+              <a:t>Project Update 1</a:t>
             </a:r>
           </a:p>
           <a:p>
@@ -3272,7 +3272,7 @@
                   <a:srgbClr val="9FB2C8"/>
                 </a:solidFill>
               </a:rPr>
-              <a:t>CSE 440 — Artificial Intelligence  ·  Section 1  ·  Instructor: Dr. Mohammad Shifat-E-Rabbi</a:t>
+              <a:t>CSE 440 (Artificial Intelligence)  ·  Section 1  ·  Instructor: Dr. Mohammad Shifat-E-Rabbi</a:t>
             </a:r>
           </a:p>
         </p:txBody>
@@ -3331,7 +3331,7 @@
                   <a:srgbClr val="606670"/>
                 </a:solidFill>
               </a:rPr>
-              <a:t>Group 5  —  Shakil Ahmed  ·  Fahim Foysal  ·  Shefa Tabassum  ·  Tanvir Ahmed</a:t>
+              <a:t>Group 5  |  Shakil Ahmed  ·  Fahim Foysal  ·  Shefa Tabassum  ·  Tanvir Ahmed</a:t>
             </a:r>
           </a:p>
         </p:txBody>
@@ -3437,7 +3437,7 @@
                   <a:srgbClr val="20242B"/>
                 </a:solidFill>
               </a:rPr>
-              <a:t>•  Movement is stochastic — the rover can slip or stall</a:t>
+              <a:t>•  Movement is stochastic: the rover can slip or stall</a:t>
             </a:r>
           </a:p>
           <a:p>
@@ -3452,7 +3452,7 @@
                   <a:srgbClr val="20242B"/>
                 </a:solidFill>
               </a:rPr>
-              <a:t>•  Goal: collect science, avoid hazards, survive — planned with an MDP</a:t>
+              <a:t>•  Goal: collect science, avoid hazards, and survive, planned with an MDP</a:t>
             </a:r>
           </a:p>
         </p:txBody>
@@ -3535,7 +3535,7 @@
                   <a:srgbClr val="606670"/>
                 </a:solidFill>
               </a:rPr>
-              <a:t>Group 5  —  Shakil Ahmed  ·  Fahim Foysal  ·  Shefa Tabassum  ·  Tanvir Ahmed</a:t>
+              <a:t>Group 5  |  Shakil Ahmed  ·  Fahim Foysal  ·  Shefa Tabassum  ·  Tanvir Ahmed</a:t>
             </a:r>
           </a:p>
         </p:txBody>
@@ -3739,7 +3739,7 @@
                   <a:srgbClr val="606670"/>
                 </a:solidFill>
               </a:rPr>
-              <a:t>Group 5  —  Shakil Ahmed  ·  Fahim Foysal  ·  Shefa Tabassum  ·  Tanvir Ahmed</a:t>
+              <a:t>Group 5  |  Shakil Ahmed  ·  Fahim Foysal  ·  Shefa Tabassum  ·  Tanvir Ahmed</a:t>
             </a:r>
           </a:p>
         </p:txBody>
@@ -3860,7 +3860,7 @@
                   <a:srgbClr val="20242B"/>
                 </a:solidFill>
               </a:rPr>
-              <a:t>•  Matplotlib terrain rendering with legend — one color per cell type</a:t>
+              <a:t>•  Matplotlib terrain rendering with legend, one color per cell type</a:t>
             </a:r>
           </a:p>
         </p:txBody>
@@ -3919,7 +3919,7 @@
                   <a:srgbClr val="606670"/>
                 </a:solidFill>
               </a:rPr>
-              <a:t>Group 5  —  Shakil Ahmed  ·  Fahim Foysal  ·  Shefa Tabassum  ·  Tanvir Ahmed</a:t>
+              <a:t>Group 5  |  Shakil Ahmed  ·  Fahim Foysal  ·  Shefa Tabassum  ·  Tanvir Ahmed</a:t>
             </a:r>
           </a:p>
         </p:txBody>
@@ -4108,7 +4108,7 @@
                   <a:srgbClr val="606670"/>
                 </a:solidFill>
               </a:rPr>
-              <a:t>Group 5  —  Shakil Ahmed  ·  Fahim Foysal  ·  Shefa Tabassum  ·  Tanvir Ahmed</a:t>
+              <a:t>Group 5  |  Shakil Ahmed  ·  Fahim Foysal  ·  Shefa Tabassum  ·  Tanvir Ahmed</a:t>
             </a:r>
           </a:p>
         </p:txBody>
